--- a/agent-observability-course/10-graphics/slides/section-09.pptx
+++ b/agent-observability-course/10-graphics/slides/section-09.pptx
@@ -874,7 +874,7 @@
           <a:p/>
           <a:p>
             <a:r>
-              <a:t>The variables are `label_values` queries, so they fill themselves; pick finance and the whole dashboard becomes finance's dashboard. Now the annotation, and a lesson in testing your dashboards. The shipped query asks for `changes()` on `atlas_build_info`. But that gauge is always one. A new release doesn't change a value; it creates a new series whose value is also one, so `changes()` stays at zero forever and the annotation never draws. The replacement asks for a build-info series that didn't exist five minutes ago, and that's true for five minutes after every deploy. I checked both with `promtool test rules` against a synthetic release; the shipped one returns nothing, the replacement returns the new version.</a:t>
+              <a:t>The variables are `label_values` queries, so they fill themselves; pick finance and the whole dashboard becomes finance's dashboard. Now the annotation, and a lesson in testing your dashboards. The obvious query asks for `changes()` on `atlas_build_info`, and an earlier version of this dashboard shipped with it. But that gauge is always one. A new release doesn't change a value; it creates a new series whose value is also one, so `changes()` stays at zero forever and the annotation never draws. The query in the JSON now asks for a build-info series that didn't exist five minutes ago, and that's true for five minutes after every deploy. I checked both with `promtool test rules` against a synthetic release: the `changes()` version returns nothing, the shipped one returns `{version="v1.1.0",prompt_version="v2"} 1` for five minutes after the deploy and nothing before or after.</a:t>
             </a:r>
           </a:p>
           <a:p/>
@@ -956,7 +956,7 @@
           <a:lstStyle/>
           <a:p>
             <a:r>
-              <a:t>Thresholds and colours come from the SLOs in 9.1, not from taste: the p95 stat turns red at four seconds, task success turns red under ninety-five percent. When a threshold changes, it changes in `slo.py` and in the JSON in the same pull request. A dashboard that disagrees with the SLO document is worse than no dashboard, because people trust the colours. And the JSON lives in git: edit in the UI, export, commit, so a dashboard change is a pull request. One dashboard per audience. And test what you can, because the annotation you just fixed looked perfectly reasonable for months.</a:t>
+              <a:t>Thresholds and colours come from the SLOs in 9.1, not from taste: the p95 stat turns red at four seconds, task success turns red under ninety-five percent. When a threshold changes, it changes in `slo.py` and in the JSON in the same pull request. A dashboard that disagrees with the SLO document is worse than no dashboard, because people trust the colours. And the JSON lives in git: edit in the UI, export, commit, so a dashboard change is a pull request. One dashboard per audience. And test what you can, because the `changes()` annotation looked perfectly reasonable for months before anyone noticed it had never drawn a line.</a:t>
             </a:r>
           </a:p>
         </p:txBody>
@@ -2602,7 +2602,7 @@
           <a:p/>
           <a:p>
             <a:r>
-              <a:t>That's the format Prometheus scrapes. Three policy questions and a ticket lookup, all resolved. A cent and a third of spend on the policy questions. And all three policy questions in the four-second bucket. That `le="4.0"` bucket is the whole latency SLO: requests under four seconds over all requests, straight from the histogram, because we put a bucket edge at the budget in 7.2. Note the `-L`: `/metrics` is a mounted app and answers the bare path with a redirect to `/metrics/`.</a:t>
+              <a:t>That's the format Prometheus scrapes. Three policy questions and a ticket lookup, all resolved. A cent and a third of spend on the policy questions. And all three policy questions in the four-second bucket. That `le="4.0"` bucket is the whole latency SLO: requests under four seconds over all requests, straight from the histogram, because we put a bucket edge at the budget in 7.2. The `-L` is habit, not a workaround: `/metrics` and `/metrics/` both answer 200.</a:t>
             </a:r>
           </a:p>
           <a:p/>
@@ -9613,7 +9613,7 @@
                 </a:solidFill>
                 <a:latin typeface="Inter"/>
               </a:rPr>
-              <a:t>Test the release annotation; </a:t>
+              <a:t>Test the release annotation with </a:t>
             </a:r>
             <a:r>
               <a:rPr sz="1656" b="0">
@@ -9622,6 +9622,24 @@
                 </a:solidFill>
                 <a:latin typeface="JetBrains Mono"/>
               </a:rPr>
+              <a:t>promtool</a:t>
+            </a:r>
+            <a:r>
+              <a:rPr sz="1800" b="1">
+                <a:solidFill>
+                  <a:srgbClr val="FFFFFF"/>
+                </a:solidFill>
+                <a:latin typeface="Inter"/>
+              </a:rPr>
+              <a:t>; </a:t>
+            </a:r>
+            <a:r>
+              <a:rPr sz="1656" b="0">
+                <a:solidFill>
+                  <a:srgbClr val="00D4AA"/>
+                </a:solidFill>
+                <a:latin typeface="JetBrains Mono"/>
+              </a:rPr>
               <a:t>changes()</a:t>
             </a:r>
             <a:r>
@@ -9631,7 +9649,7 @@
                 </a:solidFill>
                 <a:latin typeface="Inter"/>
               </a:rPr>
-              <a:t> never fires</a:t>
+              <a:t> on a constant gauge never fires</a:t>
             </a:r>
           </a:p>
         </p:txBody>
